--- a/outputs/summary/one_slide_summary.pptx
+++ b/outputs/summary/one_slide_summary.pptx
@@ -2,13 +2,13 @@
 <file path=ppt/presentation.xml><?xml version="1.0" encoding="utf-8"?>
 <p:presentation xmlns:p="http://schemas.openxmlformats.org/presentationml/2006/main">
   <p:sldMasterIdLst>
-    <p:sldMasterId xmlns:r="http://schemas.openxmlformats.org/officeDocument/2006/relationships" id="2147483648" r:id="R61f7ab7714174000"/>
+    <p:sldMasterId xmlns:r="http://schemas.openxmlformats.org/officeDocument/2006/relationships" id="2147483648" r:id="Rea162093cc8e4c2d"/>
   </p:sldMasterIdLst>
   <p:notesMasterIdLst>
-    <p:notesMasterId xmlns:r="http://schemas.openxmlformats.org/officeDocument/2006/relationships" r:id="R6302a593033c452e"/>
+    <p:notesMasterId xmlns:r="http://schemas.openxmlformats.org/officeDocument/2006/relationships" r:id="R3eecfd69fbcb46a5"/>
   </p:notesMasterIdLst>
   <p:sldIdLst>
-    <p:sldId xmlns:r="http://schemas.openxmlformats.org/officeDocument/2006/relationships" id="256" r:id="R9e321abfb01047e1"/>
+    <p:sldId xmlns:r="http://schemas.openxmlformats.org/officeDocument/2006/relationships" id="256" r:id="Ra1d34209b32c4677"/>
   </p:sldIdLst>
   <p:sldSz cx="12192000" cy="6858000"/>
   <p:notesSz cx="6858000" cy="9144000"/>
@@ -601,7 +601,7 @@
   </p:cSld>
   <p:clrMap bg1="lt1" tx1="dk1" bg2="lt2" tx2="dk2" accent1="accent1" accent2="accent2" accent3="accent3" accent4="accent4" accent5="accent5" accent6="accent6" hlink="hlink" folHlink="folHlink"/>
   <p:sldLayoutIdLst>
-    <p:sldLayoutId xmlns:r="http://schemas.openxmlformats.org/officeDocument/2006/relationships" id="2147483649" r:id="R70f58d747e3d4867"/>
+    <p:sldLayoutId xmlns:r="http://schemas.openxmlformats.org/officeDocument/2006/relationships" id="2147483649" r:id="Rdf8f9e3cf94e4568"/>
   </p:sldLayoutIdLst>
   <p:txStyles>
     <p:titleStyle>
@@ -1382,11 +1382,6 @@
         <c:crosses val="autoZero"/>
         <c:crossBetween val="between"/>
       </c:valAx>
-      <c:spPr>
-        <a:solidFill xmlns:a="http://schemas.openxmlformats.org/drawingml/2006/main">
-          <a:srgbClr val="FFFFFF"/>
-        </a:solidFill>
-      </c:spPr>
     </c:plotArea>
     <c:plotVisOnly val="1"/>
   </c:chart>
@@ -1483,6 +1478,7 @@
           <a:lstStyle xmlns:a="http://schemas.openxmlformats.org/drawingml/2006/main"/>
           <a:p xmlns:a="http://schemas.openxmlformats.org/drawingml/2006/main">
             <a:pPr algn="l">
+              <a:buNone/>
               <a:defRPr sz="900" b="1">
                 <a:solidFill>
                   <a:srgbClr val="A7F3D0"/>
@@ -1539,6 +1535,7 @@
           <a:lstStyle xmlns:a="http://schemas.openxmlformats.org/drawingml/2006/main"/>
           <a:p xmlns:a="http://schemas.openxmlformats.org/drawingml/2006/main">
             <a:pPr algn="l">
+              <a:buNone/>
               <a:defRPr sz="2550" b="1">
                 <a:solidFill>
                   <a:srgbClr val="FFFFFF"/>
@@ -1630,6 +1627,7 @@
           <a:lstStyle xmlns:a="http://schemas.openxmlformats.org/drawingml/2006/main"/>
           <a:p xmlns:a="http://schemas.openxmlformats.org/drawingml/2006/main">
             <a:pPr algn="ctr">
+              <a:buNone/>
               <a:defRPr sz="1125" b="1">
                 <a:solidFill>
                   <a:srgbClr val="FFFFFF"/>
@@ -1762,6 +1760,7 @@
           <a:lstStyle xmlns:a="http://schemas.openxmlformats.org/drawingml/2006/main"/>
           <a:p xmlns:a="http://schemas.openxmlformats.org/drawingml/2006/main">
             <a:pPr algn="l">
+              <a:buNone/>
               <a:defRPr sz="1125" b="1">
                 <a:solidFill>
                   <a:srgbClr val="334155"/>
@@ -1818,6 +1817,7 @@
           <a:lstStyle xmlns:a="http://schemas.openxmlformats.org/drawingml/2006/main"/>
           <a:p xmlns:a="http://schemas.openxmlformats.org/drawingml/2006/main">
             <a:pPr algn="l">
+              <a:buNone/>
               <a:defRPr sz="1425" b="0">
                 <a:solidFill>
                   <a:srgbClr val="0F172A"/>
@@ -1950,6 +1950,7 @@
           <a:lstStyle xmlns:a="http://schemas.openxmlformats.org/drawingml/2006/main"/>
           <a:p xmlns:a="http://schemas.openxmlformats.org/drawingml/2006/main">
             <a:pPr algn="l">
+              <a:buNone/>
               <a:defRPr sz="1125" b="1">
                 <a:solidFill>
                   <a:srgbClr val="334155"/>
@@ -2006,6 +2007,7 @@
           <a:lstStyle xmlns:a="http://schemas.openxmlformats.org/drawingml/2006/main"/>
           <a:p xmlns:a="http://schemas.openxmlformats.org/drawingml/2006/main">
             <a:pPr algn="l">
+              <a:buNone/>
               <a:defRPr sz="1425" b="0">
                 <a:solidFill>
                   <a:srgbClr val="0F172A"/>
@@ -2138,6 +2140,7 @@
           <a:lstStyle xmlns:a="http://schemas.openxmlformats.org/drawingml/2006/main"/>
           <a:p xmlns:a="http://schemas.openxmlformats.org/drawingml/2006/main">
             <a:pPr algn="l">
+              <a:buNone/>
               <a:defRPr sz="1125" b="1">
                 <a:solidFill>
                   <a:srgbClr val="334155"/>
@@ -2194,6 +2197,7 @@
           <a:lstStyle xmlns:a="http://schemas.openxmlformats.org/drawingml/2006/main"/>
           <a:p xmlns:a="http://schemas.openxmlformats.org/drawingml/2006/main">
             <a:pPr algn="l">
+              <a:buNone/>
               <a:defRPr sz="1425" b="0">
                 <a:solidFill>
                   <a:srgbClr val="0F172A"/>
@@ -2291,6 +2295,7 @@
           <a:lstStyle xmlns:a="http://schemas.openxmlformats.org/drawingml/2006/main"/>
           <a:p xmlns:a="http://schemas.openxmlformats.org/drawingml/2006/main">
             <a:pPr algn="l">
+              <a:buNone/>
               <a:defRPr sz="1125" b="1">
                 <a:solidFill>
                   <a:srgbClr val="334155"/>
@@ -2382,6 +2387,7 @@
           <a:lstStyle xmlns:a="http://schemas.openxmlformats.org/drawingml/2006/main"/>
           <a:p xmlns:a="http://schemas.openxmlformats.org/drawingml/2006/main">
             <a:pPr algn="ctr">
+              <a:buNone/>
               <a:defRPr sz="900" b="1">
                 <a:solidFill>
                   <a:srgbClr val="1E3A8A"/>
@@ -2473,6 +2479,7 @@
           <a:lstStyle xmlns:a="http://schemas.openxmlformats.org/drawingml/2006/main"/>
           <a:p xmlns:a="http://schemas.openxmlformats.org/drawingml/2006/main">
             <a:pPr algn="ctr">
+              <a:buNone/>
               <a:defRPr sz="900" b="1">
                 <a:solidFill>
                   <a:srgbClr val="065F46"/>
@@ -2564,6 +2571,7 @@
           <a:lstStyle xmlns:a="http://schemas.openxmlformats.org/drawingml/2006/main"/>
           <a:p xmlns:a="http://schemas.openxmlformats.org/drawingml/2006/main">
             <a:pPr algn="ctr">
+              <a:buNone/>
               <a:defRPr sz="900" b="1">
                 <a:solidFill>
                   <a:srgbClr val="92400E"/>
@@ -2655,6 +2663,7 @@
           <a:lstStyle xmlns:a="http://schemas.openxmlformats.org/drawingml/2006/main"/>
           <a:p xmlns:a="http://schemas.openxmlformats.org/drawingml/2006/main">
             <a:pPr algn="ctr">
+              <a:buNone/>
               <a:defRPr sz="900" b="1">
                 <a:solidFill>
                   <a:srgbClr val="9A3412"/>
@@ -2746,6 +2755,7 @@
           <a:lstStyle xmlns:a="http://schemas.openxmlformats.org/drawingml/2006/main"/>
           <a:p xmlns:a="http://schemas.openxmlformats.org/drawingml/2006/main">
             <a:pPr algn="ctr">
+              <a:buNone/>
               <a:defRPr sz="900" b="1">
                 <a:solidFill>
                   <a:srgbClr val="991B1B"/>
@@ -2843,6 +2853,7 @@
           <a:lstStyle xmlns:a="http://schemas.openxmlformats.org/drawingml/2006/main"/>
           <a:p xmlns:a="http://schemas.openxmlformats.org/drawingml/2006/main">
             <a:pPr algn="l">
+              <a:buNone/>
               <a:defRPr sz="900" b="1">
                 <a:solidFill>
                   <a:srgbClr val="0F766E"/>
@@ -2899,6 +2910,7 @@
           <a:lstStyle xmlns:a="http://schemas.openxmlformats.org/drawingml/2006/main"/>
           <a:p xmlns:a="http://schemas.openxmlformats.org/drawingml/2006/main">
             <a:pPr algn="l">
+              <a:buNone/>
               <a:defRPr sz="1800" b="1">
                 <a:solidFill>
                   <a:srgbClr val="0F172A"/>
@@ -2955,6 +2967,7 @@
           <a:lstStyle xmlns:a="http://schemas.openxmlformats.org/drawingml/2006/main"/>
           <a:p xmlns:a="http://schemas.openxmlformats.org/drawingml/2006/main">
             <a:pPr algn="l">
+              <a:buNone/>
               <a:defRPr sz="900" b="0">
                 <a:solidFill>
                   <a:srgbClr val="64748B"/>
@@ -2980,7 +2993,7 @@
       </p:sp>
       <p:graphicFrame>
         <p:nvGraphicFramePr>
-          <p:cNvPr id="76" name="Chart"/>
+          <p:cNvPr id="77" name="Chart"/>
           <p:cNvGraphicFramePr/>
           <p:nvPr/>
         </p:nvGraphicFramePr>
@@ -2990,7 +3003,7 @@
         </p:xfrm>
         <a:graphic xmlns:a="http://schemas.openxmlformats.org/drawingml/2006/main">
           <a:graphicData uri="http://schemas.openxmlformats.org/drawingml/2006/chart">
-            <c:chart xmlns:r="http://schemas.openxmlformats.org/officeDocument/2006/relationships" xmlns:c="http://schemas.openxmlformats.org/drawingml/2006/chart" r:id="Rab5de144898644cf"/>
+            <c:chart xmlns:r="http://schemas.openxmlformats.org/officeDocument/2006/relationships" xmlns:c="http://schemas.openxmlformats.org/drawingml/2006/chart" r:id="R83c36fe83e6b4d25"/>
           </a:graphicData>
         </a:graphic>
       </p:graphicFrame>
@@ -3062,6 +3075,7 @@
           <a:lstStyle xmlns:a="http://schemas.openxmlformats.org/drawingml/2006/main"/>
           <a:p xmlns:a="http://schemas.openxmlformats.org/drawingml/2006/main">
             <a:pPr algn="ctr">
+              <a:buNone/>
               <a:defRPr sz="1050" b="1">
                 <a:solidFill>
                   <a:srgbClr val="065F46"/>
@@ -3118,6 +3132,7 @@
           <a:lstStyle xmlns:a="http://schemas.openxmlformats.org/drawingml/2006/main"/>
           <a:p xmlns:a="http://schemas.openxmlformats.org/drawingml/2006/main">
             <a:pPr algn="ctr">
+              <a:buNone/>
               <a:defRPr sz="2250" b="1">
                 <a:solidFill>
                   <a:srgbClr val="064E3B"/>
@@ -3174,6 +3189,7 @@
           <a:lstStyle xmlns:a="http://schemas.openxmlformats.org/drawingml/2006/main"/>
           <a:p xmlns:a="http://schemas.openxmlformats.org/drawingml/2006/main">
             <a:pPr algn="ctr">
+              <a:buNone/>
               <a:defRPr sz="1125" b="0">
                 <a:solidFill>
                   <a:srgbClr val="0F766E"/>
@@ -3197,6 +3213,7 @@
           </a:p>
           <a:p xmlns:a="http://schemas.openxmlformats.org/drawingml/2006/main">
             <a:pPr algn="ctr">
+              <a:buNone/>
               <a:defRPr sz="1125" b="0">
                 <a:solidFill>
                   <a:srgbClr val="0F766E"/>
@@ -3288,6 +3305,7 @@
           <a:lstStyle xmlns:a="http://schemas.openxmlformats.org/drawingml/2006/main"/>
           <a:p xmlns:a="http://schemas.openxmlformats.org/drawingml/2006/main">
             <a:pPr algn="l">
+              <a:buNone/>
               <a:defRPr sz="1200" b="1">
                 <a:solidFill>
                   <a:srgbClr val="A7F3D0"/>
@@ -3344,6 +3362,7 @@
           <a:lstStyle xmlns:a="http://schemas.openxmlformats.org/drawingml/2006/main"/>
           <a:p xmlns:a="http://schemas.openxmlformats.org/drawingml/2006/main">
             <a:pPr algn="l">
+              <a:buNone/>
               <a:defRPr sz="1350" b="1">
                 <a:solidFill>
                   <a:srgbClr val="FFFFFF"/>
@@ -3400,6 +3419,7 @@
           <a:lstStyle xmlns:a="http://schemas.openxmlformats.org/drawingml/2006/main"/>
           <a:p xmlns:a="http://schemas.openxmlformats.org/drawingml/2006/main">
             <a:pPr algn="l">
+              <a:buNone/>
               <a:defRPr sz="750" b="0">
                 <a:solidFill>
                   <a:srgbClr val="CBD5E1"/>
